--- a/assets/pptx/catalog-188.pptx
+++ b/assets/pptx/catalog-188.pptx
@@ -3283,7 +3283,7 @@
                 <a:ea typeface="Ebrima"/>
                 <a:cs typeface="Ebrima"/>
               </a:rPr>
-              <a:t>ጌታ ነው የሰላም ጥጉ (2x)</a:t>
+              <a:t>ጌታ ነው የሰላም ጥጉ 2x</a:t>
             </a:r>
           </a:p>
           <a:p>
@@ -3319,7 +3319,7 @@
                 <a:ea typeface="Ebrima"/>
                 <a:cs typeface="Ebrima"/>
               </a:rPr>
-              <a:t>ኢየሱስ ነው የደስታ ጥጉ (2x)</a:t>
+              <a:t>ኢየሱስ ነው የደስታ ጥጉ 2x</a:t>
             </a:r>
           </a:p>
         </p:txBody>
@@ -3736,7 +3736,7 @@
                 <a:ea typeface="Ebrima"/>
                 <a:cs typeface="Ebrima"/>
               </a:rPr>
-              <a:t>ጌታ ነው የሰላም ጥጉ (2x)</a:t>
+              <a:t>ጌታ ነው የሰላም ጥጉ 2x</a:t>
             </a:r>
           </a:p>
           <a:p>
@@ -3772,7 +3772,7 @@
                 <a:ea typeface="Ebrima"/>
                 <a:cs typeface="Ebrima"/>
               </a:rPr>
-              <a:t>ኢየሱስ ነው የደስታ ጥጉ (2x)</a:t>
+              <a:t>ኢየሱስ ነው የደስታ ጥጉ 2x</a:t>
             </a:r>
           </a:p>
         </p:txBody>
@@ -4086,7 +4086,7 @@
                 <a:ea typeface="Ebrima"/>
                 <a:cs typeface="Ebrima"/>
               </a:rPr>
-              <a:t>ከኢየሱስ ሌላ ደስታ አለ ባይ ማን ነው (2x)</a:t>
+              <a:t>ከኢየሱስ ሌላ ደስታ አለ ባይ ማን ነው 2x</a:t>
             </a:r>
           </a:p>
         </p:txBody>
@@ -4189,7 +4189,7 @@
                 <a:ea typeface="Ebrima"/>
                 <a:cs typeface="Ebrima"/>
               </a:rPr>
-              <a:t>ጌታ ነው የሰላም ጥጉ (2x)</a:t>
+              <a:t>ጌታ ነው የሰላም ጥጉ 2x</a:t>
             </a:r>
           </a:p>
           <a:p>
@@ -4225,7 +4225,7 @@
                 <a:ea typeface="Ebrima"/>
                 <a:cs typeface="Ebrima"/>
               </a:rPr>
-              <a:t>ኢየሱስ ነው የደስታ ጥጉ (2x)</a:t>
+              <a:t>ኢየሱስ ነው የደስታ ጥጉ 2x</a:t>
             </a:r>
           </a:p>
         </p:txBody>
